--- a/Susunan Acara.pptx
+++ b/Susunan Acara.pptx
@@ -24215,16 +24215,6 @@
               <a:defRPr/>
             </a:pPr>
             <a:r>
-              <a:rPr lang="en-US" altLang="zh-CN" sz="1050" dirty="0" err="1">
-                <a:solidFill>
-                  <a:schemeClr val="tx2"/>
-                </a:solidFill>
-                <a:latin typeface="+mn-ea"/>
-                <a:cs typeface="+mn-cs"/>
-              </a:rPr>
-              <a:t>INGIN</a:t>
-            </a:r>
-            <a:r>
               <a:rPr lang="en-US" altLang="zh-CN" sz="1050" dirty="0">
                 <a:solidFill>
                   <a:schemeClr val="tx2"/>
@@ -24232,47 +24222,7 @@
                 <a:latin typeface="+mn-ea"/>
                 <a:cs typeface="+mn-cs"/>
               </a:rPr>
-              <a:t> </a:t>
-            </a:r>
-            <a:r>
-              <a:rPr lang="en-US" altLang="zh-CN" sz="1050" dirty="0" err="1">
-                <a:solidFill>
-                  <a:schemeClr val="tx2"/>
-                </a:solidFill>
-                <a:latin typeface="+mn-ea"/>
-                <a:cs typeface="+mn-cs"/>
-              </a:rPr>
-              <a:t>MENJADI</a:t>
-            </a:r>
-            <a:r>
-              <a:rPr lang="en-US" altLang="zh-CN" sz="1050" dirty="0">
-                <a:solidFill>
-                  <a:schemeClr val="tx2"/>
-                </a:solidFill>
-                <a:latin typeface="+mn-ea"/>
-                <a:cs typeface="+mn-cs"/>
-              </a:rPr>
-              <a:t> </a:t>
-            </a:r>
-            <a:r>
-              <a:rPr lang="en-US" altLang="zh-CN" sz="1050" dirty="0" err="1">
-                <a:solidFill>
-                  <a:schemeClr val="tx2"/>
-                </a:solidFill>
-                <a:latin typeface="+mn-ea"/>
-                <a:cs typeface="+mn-cs"/>
-              </a:rPr>
-              <a:t>HAFIDZ</a:t>
-            </a:r>
-            <a:r>
-              <a:rPr lang="en-US" altLang="zh-CN" sz="1050" dirty="0">
-                <a:solidFill>
-                  <a:schemeClr val="tx2"/>
-                </a:solidFill>
-                <a:latin typeface="+mn-ea"/>
-                <a:cs typeface="+mn-cs"/>
-              </a:rPr>
-              <a:t> QURAN.</a:t>
+              <a:t>x</a:t>
             </a:r>
             <a:endParaRPr lang="zh-CN" altLang="en-US" sz="1050" dirty="0">
               <a:solidFill>
@@ -24293,7 +24243,7 @@
         <p:spPr>
           <a:xfrm>
             <a:off x="1229039" y="2664767"/>
-            <a:ext cx="2138681" cy="463717"/>
+            <a:ext cx="2138681" cy="269817"/>
           </a:xfrm>
           <a:prstGeom prst="rect">
             <a:avLst/>
@@ -24312,22 +24262,13 @@
               <a:defRPr/>
             </a:pPr>
             <a:r>
-              <a:rPr lang="en-US" altLang="zh-CN" sz="1050" dirty="0" err="1">
-                <a:solidFill>
-                  <a:schemeClr val="tx2"/>
-                </a:solidFill>
-                <a:latin typeface="+mn-ea"/>
-              </a:rPr>
-              <a:t>SAMARINDA</a:t>
-            </a:r>
-            <a:r>
               <a:rPr lang="en-US" altLang="zh-CN" sz="1050" dirty="0">
                 <a:solidFill>
                   <a:schemeClr val="tx2"/>
                 </a:solidFill>
                 <a:latin typeface="+mn-ea"/>
               </a:rPr>
-              <a:t>, 1 SEPTEMBER 2011</a:t>
+              <a:t>x</a:t>
             </a:r>
             <a:endParaRPr lang="zh-CN" altLang="en-US" sz="1050" dirty="0">
               <a:solidFill>
@@ -24787,16 +24728,6 @@
               <a:defRPr/>
             </a:pPr>
             <a:r>
-              <a:rPr lang="en-US" altLang="zh-CN" sz="1050" dirty="0" err="1">
-                <a:solidFill>
-                  <a:schemeClr val="tx2"/>
-                </a:solidFill>
-                <a:latin typeface="+mn-ea"/>
-                <a:cs typeface="+mn-cs"/>
-              </a:rPr>
-              <a:t>RIDHA</a:t>
-            </a:r>
-            <a:r>
               <a:rPr lang="en-US" altLang="zh-CN" sz="1050" dirty="0">
                 <a:solidFill>
                   <a:schemeClr val="tx2"/>
@@ -24804,87 +24735,7 @@
                 <a:latin typeface="+mn-ea"/>
                 <a:cs typeface="+mn-cs"/>
               </a:rPr>
-              <a:t> ALLAH </a:t>
-            </a:r>
-            <a:r>
-              <a:rPr lang="en-US" altLang="zh-CN" sz="1050" dirty="0" err="1">
-                <a:solidFill>
-                  <a:schemeClr val="tx2"/>
-                </a:solidFill>
-                <a:latin typeface="+mn-ea"/>
-                <a:cs typeface="+mn-cs"/>
-              </a:rPr>
-              <a:t>RIDHA</a:t>
-            </a:r>
-            <a:r>
-              <a:rPr lang="en-US" altLang="zh-CN" sz="1050" dirty="0">
-                <a:solidFill>
-                  <a:schemeClr val="tx2"/>
-                </a:solidFill>
-                <a:latin typeface="+mn-ea"/>
-                <a:cs typeface="+mn-cs"/>
-              </a:rPr>
-              <a:t> </a:t>
-            </a:r>
-            <a:r>
-              <a:rPr lang="en-US" altLang="zh-CN" sz="1050" dirty="0" err="1">
-                <a:solidFill>
-                  <a:schemeClr val="tx2"/>
-                </a:solidFill>
-                <a:latin typeface="+mn-ea"/>
-                <a:cs typeface="+mn-cs"/>
-              </a:rPr>
-              <a:t>ORANGTUA</a:t>
-            </a:r>
-            <a:r>
-              <a:rPr lang="en-US" altLang="zh-CN" sz="1050" dirty="0">
-                <a:solidFill>
-                  <a:schemeClr val="tx2"/>
-                </a:solidFill>
-                <a:latin typeface="+mn-ea"/>
-                <a:cs typeface="+mn-cs"/>
-              </a:rPr>
-              <a:t> DAN </a:t>
-            </a:r>
-            <a:r>
-              <a:rPr lang="en-US" altLang="zh-CN" sz="1050" dirty="0" err="1">
-                <a:solidFill>
-                  <a:schemeClr val="tx2"/>
-                </a:solidFill>
-                <a:latin typeface="+mn-ea"/>
-                <a:cs typeface="+mn-cs"/>
-              </a:rPr>
-              <a:t>BERMANFAAT</a:t>
-            </a:r>
-            <a:r>
-              <a:rPr lang="en-US" altLang="zh-CN" sz="1050" dirty="0">
-                <a:solidFill>
-                  <a:schemeClr val="tx2"/>
-                </a:solidFill>
-                <a:latin typeface="+mn-ea"/>
-                <a:cs typeface="+mn-cs"/>
-              </a:rPr>
-              <a:t> </a:t>
-            </a:r>
-            <a:r>
-              <a:rPr lang="en-US" altLang="zh-CN" sz="1050" dirty="0" err="1">
-                <a:solidFill>
-                  <a:schemeClr val="tx2"/>
-                </a:solidFill>
-                <a:latin typeface="+mn-ea"/>
-                <a:cs typeface="+mn-cs"/>
-              </a:rPr>
-              <a:t>BAGI</a:t>
-            </a:r>
-            <a:r>
-              <a:rPr lang="en-US" altLang="zh-CN" sz="1050" dirty="0">
-                <a:solidFill>
-                  <a:schemeClr val="tx2"/>
-                </a:solidFill>
-                <a:latin typeface="+mn-ea"/>
-                <a:cs typeface="+mn-cs"/>
-              </a:rPr>
-              <a:t> ORANG LAIN.</a:t>
+              <a:t>x</a:t>
             </a:r>
             <a:endParaRPr lang="zh-CN" altLang="en-US" sz="1050" dirty="0">
               <a:solidFill>
@@ -24924,22 +24775,13 @@
               <a:defRPr/>
             </a:pPr>
             <a:r>
-              <a:rPr lang="en-US" altLang="zh-CN" sz="1050" dirty="0" err="1">
-                <a:solidFill>
-                  <a:schemeClr val="tx2"/>
-                </a:solidFill>
-                <a:latin typeface="+mn-ea"/>
-              </a:rPr>
-              <a:t>SEPAK</a:t>
-            </a:r>
-            <a:r>
               <a:rPr lang="en-US" altLang="zh-CN" sz="1050" dirty="0">
                 <a:solidFill>
                   <a:schemeClr val="tx2"/>
                 </a:solidFill>
                 <a:latin typeface="+mn-ea"/>
               </a:rPr>
-              <a:t> BOLA</a:t>
+              <a:t>x</a:t>
             </a:r>
             <a:endParaRPr lang="zh-CN" altLang="en-US" sz="1050" dirty="0">
               <a:solidFill>
@@ -25489,17 +25331,6 @@
           <a:p>
             <a:pPr algn="ctr"/>
             <a:r>
-              <a:rPr lang="en-US" altLang="zh-CN" sz="1800" dirty="0" err="1">
-                <a:solidFill>
-                  <a:srgbClr val="F9DA5D"/>
-                </a:solidFill>
-                <a:latin typeface="+mj-ea"/>
-                <a:ea typeface="+mj-ea"/>
-                <a:cs typeface="+mn-cs"/>
-              </a:rPr>
-              <a:t>AFKAR</a:t>
-            </a:r>
-            <a:r>
               <a:rPr lang="en-US" altLang="zh-CN" sz="1800" dirty="0">
                 <a:solidFill>
                   <a:srgbClr val="F9DA5D"/>
@@ -25508,40 +25339,7 @@
                 <a:ea typeface="+mj-ea"/>
                 <a:cs typeface="+mn-cs"/>
               </a:rPr>
-              <a:t> </a:t>
-            </a:r>
-            <a:r>
-              <a:rPr lang="en-US" altLang="zh-CN" sz="1800" dirty="0" err="1">
-                <a:solidFill>
-                  <a:srgbClr val="F9DA5D"/>
-                </a:solidFill>
-                <a:latin typeface="+mj-ea"/>
-                <a:ea typeface="+mj-ea"/>
-                <a:cs typeface="+mn-cs"/>
-              </a:rPr>
-              <a:t>MUKAYYIS</a:t>
-            </a:r>
-            <a:r>
-              <a:rPr lang="en-US" altLang="zh-CN" sz="1800" dirty="0">
-                <a:solidFill>
-                  <a:srgbClr val="F9DA5D"/>
-                </a:solidFill>
-                <a:latin typeface="+mj-ea"/>
-                <a:ea typeface="+mj-ea"/>
-                <a:cs typeface="+mn-cs"/>
-              </a:rPr>
-              <a:t> AL </a:t>
-            </a:r>
-            <a:r>
-              <a:rPr lang="en-US" altLang="zh-CN" sz="1800" dirty="0" err="1">
-                <a:solidFill>
-                  <a:srgbClr val="F9DA5D"/>
-                </a:solidFill>
-                <a:latin typeface="+mj-ea"/>
-                <a:ea typeface="+mj-ea"/>
-                <a:cs typeface="+mn-cs"/>
-              </a:rPr>
-              <a:t>WAHIDI</a:t>
+              <a:t>x</a:t>
             </a:r>
             <a:endParaRPr lang="zh-CN" altLang="en-US" sz="1800" dirty="0">
               <a:solidFill>
@@ -25756,37 +25554,7 @@
                 <a:latin typeface="+mn-ea"/>
                 <a:cs typeface="+mn-cs"/>
               </a:rPr>
-              <a:t>ANAK DARI : BAPAK </a:t>
-            </a:r>
-            <a:r>
-              <a:rPr lang="en-US" altLang="zh-CN" sz="1050" dirty="0" err="1">
-                <a:solidFill>
-                  <a:schemeClr val="bg1"/>
-                </a:solidFill>
-                <a:latin typeface="+mn-ea"/>
-                <a:cs typeface="+mn-cs"/>
-              </a:rPr>
-              <a:t>WAHIDI</a:t>
-            </a:r>
-            <a:r>
-              <a:rPr lang="en-US" altLang="zh-CN" sz="1050" dirty="0">
-                <a:solidFill>
-                  <a:schemeClr val="bg1"/>
-                </a:solidFill>
-                <a:latin typeface="+mn-ea"/>
-                <a:cs typeface="+mn-cs"/>
-              </a:rPr>
-              <a:t> DAN IBU </a:t>
-            </a:r>
-            <a:r>
-              <a:rPr lang="en-US" altLang="zh-CN" sz="1050" dirty="0" err="1">
-                <a:solidFill>
-                  <a:schemeClr val="bg1"/>
-                </a:solidFill>
-                <a:latin typeface="+mn-ea"/>
-                <a:cs typeface="+mn-cs"/>
-              </a:rPr>
-              <a:t>ANISYAH</a:t>
+              <a:t>ANAK DARI : BAPAK x DAN IBU x</a:t>
             </a:r>
             <a:endParaRPr lang="zh-CN" altLang="en-US" sz="1050" dirty="0">
               <a:solidFill>
